--- a/presentation/פרויקט עיצוב התנהגות.pptx - ארכיטקטורה.pptx
+++ b/presentation/פרויקט עיצוב התנהגות.pptx - ארכיטקטורה.pptx
@@ -6,6 +6,17 @@
   </p:sldMasterIdLst>
   <p:sldIdLst>
     <p:sldId id="256" r:id="rId2"/>
+    <p:sldId id="257" r:id="rId3"/>
+    <p:sldId id="258" r:id="rId4"/>
+    <p:sldId id="259" r:id="rId5"/>
+    <p:sldId id="260" r:id="rId6"/>
+    <p:sldId id="261" r:id="rId7"/>
+    <p:sldId id="262" r:id="rId8"/>
+    <p:sldId id="263" r:id="rId9"/>
+    <p:sldId id="264" r:id="rId10"/>
+    <p:sldId id="265" r:id="rId11"/>
+    <p:sldId id="266" r:id="rId12"/>
+    <p:sldId id="267" r:id="rId13"/>
   </p:sldIdLst>
   <p:sldSz cx="12192000" cy="6858000"/>
   <p:notesSz cx="6858000" cy="9144000"/>
@@ -104,6 +115,11 @@
       </a:defRPr>
     </a:lvl9pPr>
   </p:defaultTextStyle>
+  <p:extLst>
+    <p:ext uri="{EFAFB233-063F-42B5-8137-9DF3F51BA10A}">
+      <p15:sldGuideLst xmlns:p15="http://schemas.microsoft.com/office/powerpoint/2012/main"/>
+    </p:ext>
+  </p:extLst>
 </p:presentation>
 </file>
 
@@ -254,7 +270,7 @@
           <a:p>
             <a:fld id="{657D19D0-B134-4430-A086-BCE11C72DF66}" type="datetimeFigureOut">
               <a:rPr lang="he-IL" smtClean="0"/>
-              <a:t>כ"א/כסלו/תשפ"ו</a:t>
+              <a:t>י"ז/שבט/תשפ"ו</a:t>
             </a:fld>
             <a:endParaRPr lang="he-IL"/>
           </a:p>
@@ -452,7 +468,7 @@
           <a:p>
             <a:fld id="{657D19D0-B134-4430-A086-BCE11C72DF66}" type="datetimeFigureOut">
               <a:rPr lang="he-IL" smtClean="0"/>
-              <a:t>כ"א/כסלו/תשפ"ו</a:t>
+              <a:t>י"ז/שבט/תשפ"ו</a:t>
             </a:fld>
             <a:endParaRPr lang="he-IL"/>
           </a:p>
@@ -660,7 +676,7 @@
           <a:p>
             <a:fld id="{657D19D0-B134-4430-A086-BCE11C72DF66}" type="datetimeFigureOut">
               <a:rPr lang="he-IL" smtClean="0"/>
-              <a:t>כ"א/כסלו/תשפ"ו</a:t>
+              <a:t>י"ז/שבט/תשפ"ו</a:t>
             </a:fld>
             <a:endParaRPr lang="he-IL"/>
           </a:p>
@@ -858,7 +874,7 @@
           <a:p>
             <a:fld id="{657D19D0-B134-4430-A086-BCE11C72DF66}" type="datetimeFigureOut">
               <a:rPr lang="he-IL" smtClean="0"/>
-              <a:t>כ"א/כסלו/תשפ"ו</a:t>
+              <a:t>י"ז/שבט/תשפ"ו</a:t>
             </a:fld>
             <a:endParaRPr lang="he-IL"/>
           </a:p>
@@ -1133,7 +1149,7 @@
           <a:p>
             <a:fld id="{657D19D0-B134-4430-A086-BCE11C72DF66}" type="datetimeFigureOut">
               <a:rPr lang="he-IL" smtClean="0"/>
-              <a:t>כ"א/כסלו/תשפ"ו</a:t>
+              <a:t>י"ז/שבט/תשפ"ו</a:t>
             </a:fld>
             <a:endParaRPr lang="he-IL"/>
           </a:p>
@@ -1398,7 +1414,7 @@
           <a:p>
             <a:fld id="{657D19D0-B134-4430-A086-BCE11C72DF66}" type="datetimeFigureOut">
               <a:rPr lang="he-IL" smtClean="0"/>
-              <a:t>כ"א/כסלו/תשפ"ו</a:t>
+              <a:t>י"ז/שבט/תשפ"ו</a:t>
             </a:fld>
             <a:endParaRPr lang="he-IL"/>
           </a:p>
@@ -1810,7 +1826,7 @@
           <a:p>
             <a:fld id="{657D19D0-B134-4430-A086-BCE11C72DF66}" type="datetimeFigureOut">
               <a:rPr lang="he-IL" smtClean="0"/>
-              <a:t>כ"א/כסלו/תשפ"ו</a:t>
+              <a:t>י"ז/שבט/תשפ"ו</a:t>
             </a:fld>
             <a:endParaRPr lang="he-IL"/>
           </a:p>
@@ -1951,7 +1967,7 @@
           <a:p>
             <a:fld id="{657D19D0-B134-4430-A086-BCE11C72DF66}" type="datetimeFigureOut">
               <a:rPr lang="he-IL" smtClean="0"/>
-              <a:t>כ"א/כסלו/תשפ"ו</a:t>
+              <a:t>י"ז/שבט/תשפ"ו</a:t>
             </a:fld>
             <a:endParaRPr lang="he-IL"/>
           </a:p>
@@ -2064,7 +2080,7 @@
           <a:p>
             <a:fld id="{657D19D0-B134-4430-A086-BCE11C72DF66}" type="datetimeFigureOut">
               <a:rPr lang="he-IL" smtClean="0"/>
-              <a:t>כ"א/כסלו/תשפ"ו</a:t>
+              <a:t>י"ז/שבט/תשפ"ו</a:t>
             </a:fld>
             <a:endParaRPr lang="he-IL"/>
           </a:p>
@@ -2375,7 +2391,7 @@
           <a:p>
             <a:fld id="{657D19D0-B134-4430-A086-BCE11C72DF66}" type="datetimeFigureOut">
               <a:rPr lang="he-IL" smtClean="0"/>
-              <a:t>כ"א/כסלו/תשפ"ו</a:t>
+              <a:t>י"ז/שבט/תשפ"ו</a:t>
             </a:fld>
             <a:endParaRPr lang="he-IL"/>
           </a:p>
@@ -2663,7 +2679,7 @@
           <a:p>
             <a:fld id="{657D19D0-B134-4430-A086-BCE11C72DF66}" type="datetimeFigureOut">
               <a:rPr lang="he-IL" smtClean="0"/>
-              <a:t>כ"א/כסלו/תשפ"ו</a:t>
+              <a:t>י"ז/שבט/תשפ"ו</a:t>
             </a:fld>
             <a:endParaRPr lang="he-IL"/>
           </a:p>
@@ -2904,7 +2920,7 @@
           <a:p>
             <a:fld id="{657D19D0-B134-4430-A086-BCE11C72DF66}" type="datetimeFigureOut">
               <a:rPr lang="he-IL" smtClean="0"/>
-              <a:t>כ"א/כסלו/תשפ"ו</a:t>
+              <a:t>י"ז/שבט/תשפ"ו</a:t>
             </a:fld>
             <a:endParaRPr lang="he-IL"/>
           </a:p>
@@ -3541,6 +3557,1373 @@
 </p:sld>
 </file>
 
+<file path=ppt/slides/slide10.xml><?xml version="1.0" encoding="utf-8"?>
+<p:sld xmlns:a="http://schemas.openxmlformats.org/drawingml/2006/main" xmlns:r="http://schemas.openxmlformats.org/officeDocument/2006/relationships" xmlns:p="http://schemas.openxmlformats.org/presentationml/2006/main">
+  <p:cSld>
+    <p:spTree>
+      <p:nvGrpSpPr>
+        <p:cNvPr id="1" name=""/>
+        <p:cNvGrpSpPr/>
+        <p:nvPr/>
+      </p:nvGrpSpPr>
+      <p:grpSpPr>
+        <a:xfrm>
+          <a:off x="0" y="0"/>
+          <a:ext cx="0" cy="0"/>
+          <a:chOff x="0" y="0"/>
+          <a:chExt cx="0" cy="0"/>
+        </a:xfrm>
+      </p:grpSpPr>
+      <p:sp>
+        <p:nvSpPr>
+          <p:cNvPr id="2" name="כותרת 1">
+            <a:extLst>
+              <a:ext uri="{FF2B5EF4-FFF2-40B4-BE49-F238E27FC236}">
+                <a16:creationId xmlns:a16="http://schemas.microsoft.com/office/drawing/2014/main" id="{24AD387F-DB3E-F7CA-3FAB-DFCE8FED88DF}"/>
+              </a:ext>
+            </a:extLst>
+          </p:cNvPr>
+          <p:cNvSpPr>
+            <a:spLocks noGrp="1"/>
+          </p:cNvSpPr>
+          <p:nvPr>
+            <p:ph type="title"/>
+          </p:nvPr>
+        </p:nvSpPr>
+        <p:spPr/>
+        <p:txBody>
+          <a:bodyPr/>
+          <a:lstStyle/>
+          <a:p>
+            <a:pPr algn="l" rtl="0"/>
+            <a:r>
+              <a:rPr lang="en-US" dirty="0"/>
+              <a:t>Main Flows (User Flows)</a:t>
+            </a:r>
+            <a:endParaRPr lang="he-IL" dirty="0"/>
+          </a:p>
+        </p:txBody>
+      </p:sp>
+      <p:sp>
+        <p:nvSpPr>
+          <p:cNvPr id="3" name="מציין מיקום תוכן 2">
+            <a:extLst>
+              <a:ext uri="{FF2B5EF4-FFF2-40B4-BE49-F238E27FC236}">
+                <a16:creationId xmlns:a16="http://schemas.microsoft.com/office/drawing/2014/main" id="{B65E7401-5698-228F-4D3D-7A5C4FD4F8C4}"/>
+              </a:ext>
+            </a:extLst>
+          </p:cNvPr>
+          <p:cNvSpPr>
+            <a:spLocks noGrp="1"/>
+          </p:cNvSpPr>
+          <p:nvPr>
+            <p:ph idx="1"/>
+          </p:nvPr>
+        </p:nvSpPr>
+        <p:spPr/>
+        <p:txBody>
+          <a:bodyPr/>
+          <a:lstStyle/>
+          <a:p>
+            <a:pPr algn="l" rtl="0"/>
+            <a:r>
+              <a:rPr lang="en-US" dirty="0"/>
+              <a:t>Teacher enters daily scores</a:t>
+            </a:r>
+          </a:p>
+          <a:p>
+            <a:pPr algn="l" rtl="0"/>
+            <a:r>
+              <a:rPr lang="en-US" dirty="0"/>
+              <a:t>Weekly excellence calculation</a:t>
+            </a:r>
+          </a:p>
+          <a:p>
+            <a:pPr algn="l" rtl="0"/>
+            <a:r>
+              <a:rPr lang="en-US" dirty="0"/>
+              <a:t>Student views progress</a:t>
+            </a:r>
+          </a:p>
+          <a:p>
+            <a:pPr algn="l" rtl="0"/>
+            <a:r>
+              <a:rPr lang="en-US" dirty="0"/>
+              <a:t>Voucher redemption in kiosk</a:t>
+            </a:r>
+            <a:endParaRPr lang="he-IL" dirty="0"/>
+          </a:p>
+        </p:txBody>
+      </p:sp>
+    </p:spTree>
+    <p:extLst>
+      <p:ext uri="{BB962C8B-B14F-4D97-AF65-F5344CB8AC3E}">
+        <p14:creationId xmlns:p14="http://schemas.microsoft.com/office/powerpoint/2010/main" val="1648077510"/>
+      </p:ext>
+    </p:extLst>
+  </p:cSld>
+  <p:clrMapOvr>
+    <a:masterClrMapping/>
+  </p:clrMapOvr>
+</p:sld>
+</file>
+
+<file path=ppt/slides/slide11.xml><?xml version="1.0" encoding="utf-8"?>
+<p:sld xmlns:a="http://schemas.openxmlformats.org/drawingml/2006/main" xmlns:r="http://schemas.openxmlformats.org/officeDocument/2006/relationships" xmlns:p="http://schemas.openxmlformats.org/presentationml/2006/main">
+  <p:cSld>
+    <p:spTree>
+      <p:nvGrpSpPr>
+        <p:cNvPr id="1" name=""/>
+        <p:cNvGrpSpPr/>
+        <p:nvPr/>
+      </p:nvGrpSpPr>
+      <p:grpSpPr>
+        <a:xfrm>
+          <a:off x="0" y="0"/>
+          <a:ext cx="0" cy="0"/>
+          <a:chOff x="0" y="0"/>
+          <a:chExt cx="0" cy="0"/>
+        </a:xfrm>
+      </p:grpSpPr>
+      <p:sp>
+        <p:nvSpPr>
+          <p:cNvPr id="2" name="כותרת 1">
+            <a:extLst>
+              <a:ext uri="{FF2B5EF4-FFF2-40B4-BE49-F238E27FC236}">
+                <a16:creationId xmlns:a16="http://schemas.microsoft.com/office/drawing/2014/main" id="{C3AB5676-B4BB-6366-46E1-C38FB5D4156C}"/>
+              </a:ext>
+            </a:extLst>
+          </p:cNvPr>
+          <p:cNvSpPr>
+            <a:spLocks noGrp="1"/>
+          </p:cNvSpPr>
+          <p:nvPr>
+            <p:ph type="title"/>
+          </p:nvPr>
+        </p:nvSpPr>
+        <p:spPr/>
+        <p:txBody>
+          <a:bodyPr/>
+          <a:lstStyle/>
+          <a:p>
+            <a:pPr algn="l" rtl="0"/>
+            <a:r>
+              <a:rPr lang="en-US" dirty="0"/>
+              <a:t>Scalability &amp; Future Expansion</a:t>
+            </a:r>
+            <a:endParaRPr lang="he-IL" dirty="0"/>
+          </a:p>
+        </p:txBody>
+      </p:sp>
+      <p:sp>
+        <p:nvSpPr>
+          <p:cNvPr id="3" name="מציין מיקום תוכן 2">
+            <a:extLst>
+              <a:ext uri="{FF2B5EF4-FFF2-40B4-BE49-F238E27FC236}">
+                <a16:creationId xmlns:a16="http://schemas.microsoft.com/office/drawing/2014/main" id="{67172EAE-64C8-B283-6689-9AEE8FFBACE7}"/>
+              </a:ext>
+            </a:extLst>
+          </p:cNvPr>
+          <p:cNvSpPr>
+            <a:spLocks noGrp="1"/>
+          </p:cNvSpPr>
+          <p:nvPr>
+            <p:ph idx="1"/>
+          </p:nvPr>
+        </p:nvSpPr>
+        <p:spPr/>
+        <p:txBody>
+          <a:bodyPr/>
+          <a:lstStyle/>
+          <a:p>
+            <a:pPr algn="l" rtl="0"/>
+            <a:r>
+              <a:rPr lang="en-US" dirty="0"/>
+              <a:t>Modular backend</a:t>
+            </a:r>
+          </a:p>
+          <a:p>
+            <a:pPr algn="l" rtl="0"/>
+            <a:r>
+              <a:rPr lang="en-US" dirty="0"/>
+              <a:t>Flexible data model</a:t>
+            </a:r>
+          </a:p>
+          <a:p>
+            <a:pPr algn="l" rtl="0"/>
+            <a:r>
+              <a:rPr lang="en-US" dirty="0"/>
+              <a:t>Ready for:</a:t>
+            </a:r>
+          </a:p>
+          <a:p>
+            <a:pPr lvl="1" algn="l" rtl="0"/>
+            <a:r>
+              <a:rPr lang="en-US" dirty="0"/>
+              <a:t>Management dashboards</a:t>
+            </a:r>
+          </a:p>
+          <a:p>
+            <a:pPr lvl="1" algn="l" rtl="0"/>
+            <a:r>
+              <a:rPr lang="en-US" dirty="0"/>
+              <a:t>Advanced analytics</a:t>
+            </a:r>
+          </a:p>
+          <a:p>
+            <a:pPr lvl="1" algn="l" rtl="0"/>
+            <a:r>
+              <a:rPr lang="en-US" dirty="0"/>
+              <a:t>AI-based insights</a:t>
+            </a:r>
+            <a:endParaRPr lang="he-IL" dirty="0"/>
+          </a:p>
+        </p:txBody>
+      </p:sp>
+    </p:spTree>
+    <p:extLst>
+      <p:ext uri="{BB962C8B-B14F-4D97-AF65-F5344CB8AC3E}">
+        <p14:creationId xmlns:p14="http://schemas.microsoft.com/office/powerpoint/2010/main" val="1023436033"/>
+      </p:ext>
+    </p:extLst>
+  </p:cSld>
+  <p:clrMapOvr>
+    <a:masterClrMapping/>
+  </p:clrMapOvr>
+</p:sld>
+</file>
+
+<file path=ppt/slides/slide12.xml><?xml version="1.0" encoding="utf-8"?>
+<p:sld xmlns:a="http://schemas.openxmlformats.org/drawingml/2006/main" xmlns:r="http://schemas.openxmlformats.org/officeDocument/2006/relationships" xmlns:p="http://schemas.openxmlformats.org/presentationml/2006/main">
+  <p:cSld>
+    <p:spTree>
+      <p:nvGrpSpPr>
+        <p:cNvPr id="1" name=""/>
+        <p:cNvGrpSpPr/>
+        <p:nvPr/>
+      </p:nvGrpSpPr>
+      <p:grpSpPr>
+        <a:xfrm>
+          <a:off x="0" y="0"/>
+          <a:ext cx="0" cy="0"/>
+          <a:chOff x="0" y="0"/>
+          <a:chExt cx="0" cy="0"/>
+        </a:xfrm>
+      </p:grpSpPr>
+      <p:sp>
+        <p:nvSpPr>
+          <p:cNvPr id="2" name="כותרת 1">
+            <a:extLst>
+              <a:ext uri="{FF2B5EF4-FFF2-40B4-BE49-F238E27FC236}">
+                <a16:creationId xmlns:a16="http://schemas.microsoft.com/office/drawing/2014/main" id="{00AE14CC-0A82-B2A0-DE4D-C7080848B481}"/>
+              </a:ext>
+            </a:extLst>
+          </p:cNvPr>
+          <p:cNvSpPr>
+            <a:spLocks noGrp="1"/>
+          </p:cNvSpPr>
+          <p:nvPr>
+            <p:ph type="title"/>
+          </p:nvPr>
+        </p:nvSpPr>
+        <p:spPr/>
+        <p:txBody>
+          <a:bodyPr/>
+          <a:lstStyle/>
+          <a:p>
+            <a:pPr algn="l" rtl="0"/>
+            <a:r>
+              <a:rPr lang="en-US" dirty="0"/>
+              <a:t>Summary</a:t>
+            </a:r>
+            <a:endParaRPr lang="he-IL" dirty="0"/>
+          </a:p>
+        </p:txBody>
+      </p:sp>
+      <p:sp>
+        <p:nvSpPr>
+          <p:cNvPr id="3" name="מציין מיקום תוכן 2">
+            <a:extLst>
+              <a:ext uri="{FF2B5EF4-FFF2-40B4-BE49-F238E27FC236}">
+                <a16:creationId xmlns:a16="http://schemas.microsoft.com/office/drawing/2014/main" id="{BD807DF7-D9A1-3E40-4410-0AACE37A2728}"/>
+              </a:ext>
+            </a:extLst>
+          </p:cNvPr>
+          <p:cNvSpPr>
+            <a:spLocks noGrp="1"/>
+          </p:cNvSpPr>
+          <p:nvPr>
+            <p:ph idx="1"/>
+          </p:nvPr>
+        </p:nvSpPr>
+        <p:spPr/>
+        <p:txBody>
+          <a:bodyPr/>
+          <a:lstStyle/>
+          <a:p>
+            <a:pPr algn="l" rtl="0"/>
+            <a:r>
+              <a:rPr lang="en-US" dirty="0"/>
+              <a:t>Clean separation of layers</a:t>
+            </a:r>
+            <a:endParaRPr lang="he-IL" dirty="0"/>
+          </a:p>
+          <a:p>
+            <a:pPr algn="l" rtl="0"/>
+            <a:r>
+              <a:rPr lang="en-US" dirty="0"/>
+              <a:t>Strong educational business logic</a:t>
+            </a:r>
+            <a:endParaRPr lang="he-IL" dirty="0"/>
+          </a:p>
+          <a:p>
+            <a:pPr algn="l" rtl="0"/>
+            <a:r>
+              <a:rPr lang="en-US" dirty="0"/>
+              <a:t>Data-driven system</a:t>
+            </a:r>
+            <a:endParaRPr lang="he-IL" dirty="0"/>
+          </a:p>
+          <a:p>
+            <a:pPr algn="l" rtl="0"/>
+            <a:r>
+              <a:rPr lang="en-US" dirty="0"/>
+              <a:t>Built for growth</a:t>
+            </a:r>
+            <a:endParaRPr lang="he-IL" dirty="0"/>
+          </a:p>
+          <a:p>
+            <a:pPr marL="0" indent="0" algn="l" rtl="0">
+              <a:buNone/>
+            </a:pPr>
+            <a:r>
+              <a:rPr lang="en-US" dirty="0"/>
+              <a:t>The architecture supports both current needs and future educational growth.</a:t>
+            </a:r>
+            <a:endParaRPr lang="he-IL" dirty="0"/>
+          </a:p>
+        </p:txBody>
+      </p:sp>
+    </p:spTree>
+    <p:extLst>
+      <p:ext uri="{BB962C8B-B14F-4D97-AF65-F5344CB8AC3E}">
+        <p14:creationId xmlns:p14="http://schemas.microsoft.com/office/powerpoint/2010/main" val="3416430131"/>
+      </p:ext>
+    </p:extLst>
+  </p:cSld>
+  <p:clrMapOvr>
+    <a:masterClrMapping/>
+  </p:clrMapOvr>
+</p:sld>
+</file>
+
+<file path=ppt/slides/slide2.xml><?xml version="1.0" encoding="utf-8"?>
+<p:sld xmlns:a="http://schemas.openxmlformats.org/drawingml/2006/main" xmlns:r="http://schemas.openxmlformats.org/officeDocument/2006/relationships" xmlns:p="http://schemas.openxmlformats.org/presentationml/2006/main">
+  <p:cSld>
+    <p:spTree>
+      <p:nvGrpSpPr>
+        <p:cNvPr id="1" name=""/>
+        <p:cNvGrpSpPr/>
+        <p:nvPr/>
+      </p:nvGrpSpPr>
+      <p:grpSpPr>
+        <a:xfrm>
+          <a:off x="0" y="0"/>
+          <a:ext cx="0" cy="0"/>
+          <a:chOff x="0" y="0"/>
+          <a:chExt cx="0" cy="0"/>
+        </a:xfrm>
+      </p:grpSpPr>
+      <p:sp>
+        <p:nvSpPr>
+          <p:cNvPr id="2" name="כותרת 1">
+            <a:extLst>
+              <a:ext uri="{FF2B5EF4-FFF2-40B4-BE49-F238E27FC236}">
+                <a16:creationId xmlns:a16="http://schemas.microsoft.com/office/drawing/2014/main" id="{7D342808-8D00-A6DD-2F9C-BF5E357D0D0E}"/>
+              </a:ext>
+            </a:extLst>
+          </p:cNvPr>
+          <p:cNvSpPr>
+            <a:spLocks noGrp="1"/>
+          </p:cNvSpPr>
+          <p:nvPr>
+            <p:ph type="title"/>
+          </p:nvPr>
+        </p:nvSpPr>
+        <p:spPr/>
+        <p:txBody>
+          <a:bodyPr/>
+          <a:lstStyle/>
+          <a:p>
+            <a:pPr algn="l" rtl="0"/>
+            <a:r>
+              <a:rPr lang="en-US" dirty="0"/>
+              <a:t>Architecture Overview</a:t>
+            </a:r>
+            <a:endParaRPr lang="he-IL" dirty="0"/>
+          </a:p>
+        </p:txBody>
+      </p:sp>
+      <p:sp>
+        <p:nvSpPr>
+          <p:cNvPr id="3" name="מציין מיקום תוכן 2">
+            <a:extLst>
+              <a:ext uri="{FF2B5EF4-FFF2-40B4-BE49-F238E27FC236}">
+                <a16:creationId xmlns:a16="http://schemas.microsoft.com/office/drawing/2014/main" id="{3831CA07-2F8F-3ED5-65DB-913ECB66663E}"/>
+              </a:ext>
+            </a:extLst>
+          </p:cNvPr>
+          <p:cNvSpPr>
+            <a:spLocks noGrp="1"/>
+          </p:cNvSpPr>
+          <p:nvPr>
+            <p:ph idx="1"/>
+          </p:nvPr>
+        </p:nvSpPr>
+        <p:spPr/>
+        <p:txBody>
+          <a:bodyPr>
+            <a:normAutofit lnSpcReduction="10000"/>
+          </a:bodyPr>
+          <a:lstStyle/>
+          <a:p>
+            <a:pPr algn="l" rtl="0"/>
+            <a:r>
+              <a:rPr lang="en-US" dirty="0"/>
+              <a:t>Description:</a:t>
+            </a:r>
+          </a:p>
+          <a:p>
+            <a:pPr lvl="1" algn="l" rtl="0"/>
+            <a:r>
+              <a:rPr lang="en-US" dirty="0"/>
+              <a:t>An educational platform designed to manage, monitor, and analyze students’ behavioral progress and excellence over time.</a:t>
+            </a:r>
+          </a:p>
+          <a:p>
+            <a:pPr algn="l" rtl="0"/>
+            <a:r>
+              <a:rPr lang="en-US" dirty="0"/>
+              <a:t>Purpose:</a:t>
+            </a:r>
+          </a:p>
+          <a:p>
+            <a:pPr lvl="1" algn="l" rtl="0"/>
+            <a:r>
+              <a:rPr lang="en-US" dirty="0"/>
+              <a:t>To provide a structured, data-driven system for tracking student progress, supporting positive behavior, and managing the allocation and redemption of rewards through a digital platform.</a:t>
+            </a:r>
+          </a:p>
+          <a:p>
+            <a:pPr algn="l" rtl="0"/>
+            <a:r>
+              <a:rPr lang="en-US" dirty="0"/>
+              <a:t>Target Audience:</a:t>
+            </a:r>
+          </a:p>
+          <a:p>
+            <a:pPr lvl="1" algn="l" rtl="0"/>
+            <a:r>
+              <a:rPr lang="en-US" dirty="0"/>
+              <a:t>Teaching staff</a:t>
+            </a:r>
+          </a:p>
+          <a:p>
+            <a:pPr lvl="1" algn="l" rtl="0"/>
+            <a:r>
+              <a:rPr lang="en-US" dirty="0"/>
+              <a:t>Management and therapeutic teams</a:t>
+            </a:r>
+          </a:p>
+          <a:p>
+            <a:pPr lvl="1" algn="l" rtl="0"/>
+            <a:r>
+              <a:rPr lang="en-US" dirty="0"/>
+              <a:t>Students</a:t>
+            </a:r>
+          </a:p>
+        </p:txBody>
+      </p:sp>
+    </p:spTree>
+    <p:extLst>
+      <p:ext uri="{BB962C8B-B14F-4D97-AF65-F5344CB8AC3E}">
+        <p14:creationId xmlns:p14="http://schemas.microsoft.com/office/powerpoint/2010/main" val="2971518835"/>
+      </p:ext>
+    </p:extLst>
+  </p:cSld>
+  <p:clrMapOvr>
+    <a:masterClrMapping/>
+  </p:clrMapOvr>
+</p:sld>
+</file>
+
+<file path=ppt/slides/slide3.xml><?xml version="1.0" encoding="utf-8"?>
+<p:sld xmlns:a="http://schemas.openxmlformats.org/drawingml/2006/main" xmlns:r="http://schemas.openxmlformats.org/officeDocument/2006/relationships" xmlns:p="http://schemas.openxmlformats.org/presentationml/2006/main">
+  <p:cSld>
+    <p:spTree>
+      <p:nvGrpSpPr>
+        <p:cNvPr id="1" name=""/>
+        <p:cNvGrpSpPr/>
+        <p:nvPr/>
+      </p:nvGrpSpPr>
+      <p:grpSpPr>
+        <a:xfrm>
+          <a:off x="0" y="0"/>
+          <a:ext cx="0" cy="0"/>
+          <a:chOff x="0" y="0"/>
+          <a:chExt cx="0" cy="0"/>
+        </a:xfrm>
+      </p:grpSpPr>
+      <p:sp>
+        <p:nvSpPr>
+          <p:cNvPr id="2" name="כותרת 1">
+            <a:extLst>
+              <a:ext uri="{FF2B5EF4-FFF2-40B4-BE49-F238E27FC236}">
+                <a16:creationId xmlns:a16="http://schemas.microsoft.com/office/drawing/2014/main" id="{29158E94-E175-8916-A1A8-0A490AED0143}"/>
+              </a:ext>
+            </a:extLst>
+          </p:cNvPr>
+          <p:cNvSpPr>
+            <a:spLocks noGrp="1"/>
+          </p:cNvSpPr>
+          <p:nvPr>
+            <p:ph type="title"/>
+          </p:nvPr>
+        </p:nvSpPr>
+        <p:spPr/>
+        <p:txBody>
+          <a:bodyPr/>
+          <a:lstStyle/>
+          <a:p>
+            <a:pPr algn="l" rtl="0"/>
+            <a:r>
+              <a:rPr lang="en-US" dirty="0"/>
+              <a:t>Design Principles </a:t>
+            </a:r>
+            <a:endParaRPr lang="he-IL" dirty="0"/>
+          </a:p>
+        </p:txBody>
+      </p:sp>
+      <p:sp>
+        <p:nvSpPr>
+          <p:cNvPr id="3" name="מציין מיקום תוכן 2">
+            <a:extLst>
+              <a:ext uri="{FF2B5EF4-FFF2-40B4-BE49-F238E27FC236}">
+                <a16:creationId xmlns:a16="http://schemas.microsoft.com/office/drawing/2014/main" id="{1CB79BF0-3D7C-DB34-6462-AE4F08FBFE96}"/>
+              </a:ext>
+            </a:extLst>
+          </p:cNvPr>
+          <p:cNvSpPr>
+            <a:spLocks noGrp="1"/>
+          </p:cNvSpPr>
+          <p:nvPr>
+            <p:ph idx="1"/>
+          </p:nvPr>
+        </p:nvSpPr>
+        <p:spPr/>
+        <p:txBody>
+          <a:bodyPr/>
+          <a:lstStyle/>
+          <a:p>
+            <a:pPr algn="l" rtl="0"/>
+            <a:r>
+              <a:rPr lang="en-US" dirty="0"/>
+              <a:t>Separation of Concerns</a:t>
+            </a:r>
+          </a:p>
+          <a:p>
+            <a:pPr algn="l" rtl="0"/>
+            <a:r>
+              <a:rPr lang="en-US" dirty="0"/>
+              <a:t>Business Logic on Backend</a:t>
+            </a:r>
+          </a:p>
+          <a:p>
+            <a:pPr algn="l" rtl="0"/>
+            <a:r>
+              <a:rPr lang="en-US" dirty="0"/>
+              <a:t>Role-Based Access</a:t>
+            </a:r>
+          </a:p>
+          <a:p>
+            <a:pPr algn="l" rtl="0"/>
+            <a:r>
+              <a:rPr lang="en-US" dirty="0"/>
+              <a:t>Data-driven decision making</a:t>
+            </a:r>
+          </a:p>
+          <a:p>
+            <a:pPr algn="l" rtl="0"/>
+            <a:r>
+              <a:rPr lang="en-US" dirty="0"/>
+              <a:t>Scalability &amp; Future Expansion</a:t>
+            </a:r>
+            <a:endParaRPr lang="he-IL" dirty="0"/>
+          </a:p>
+        </p:txBody>
+      </p:sp>
+    </p:spTree>
+    <p:extLst>
+      <p:ext uri="{BB962C8B-B14F-4D97-AF65-F5344CB8AC3E}">
+        <p14:creationId xmlns:p14="http://schemas.microsoft.com/office/powerpoint/2010/main" val="1694091144"/>
+      </p:ext>
+    </p:extLst>
+  </p:cSld>
+  <p:clrMapOvr>
+    <a:masterClrMapping/>
+  </p:clrMapOvr>
+</p:sld>
+</file>
+
+<file path=ppt/slides/slide4.xml><?xml version="1.0" encoding="utf-8"?>
+<p:sld xmlns:a="http://schemas.openxmlformats.org/drawingml/2006/main" xmlns:r="http://schemas.openxmlformats.org/officeDocument/2006/relationships" xmlns:p="http://schemas.openxmlformats.org/presentationml/2006/main">
+  <p:cSld>
+    <p:spTree>
+      <p:nvGrpSpPr>
+        <p:cNvPr id="1" name=""/>
+        <p:cNvGrpSpPr/>
+        <p:nvPr/>
+      </p:nvGrpSpPr>
+      <p:grpSpPr>
+        <a:xfrm>
+          <a:off x="0" y="0"/>
+          <a:ext cx="0" cy="0"/>
+          <a:chOff x="0" y="0"/>
+          <a:chExt cx="0" cy="0"/>
+        </a:xfrm>
+      </p:grpSpPr>
+      <p:sp>
+        <p:nvSpPr>
+          <p:cNvPr id="2" name="כותרת 1">
+            <a:extLst>
+              <a:ext uri="{FF2B5EF4-FFF2-40B4-BE49-F238E27FC236}">
+                <a16:creationId xmlns:a16="http://schemas.microsoft.com/office/drawing/2014/main" id="{D21802BD-8024-0460-152E-4BD49F258E0F}"/>
+              </a:ext>
+            </a:extLst>
+          </p:cNvPr>
+          <p:cNvSpPr>
+            <a:spLocks noGrp="1"/>
+          </p:cNvSpPr>
+          <p:nvPr>
+            <p:ph type="title"/>
+          </p:nvPr>
+        </p:nvSpPr>
+        <p:spPr/>
+        <p:txBody>
+          <a:bodyPr/>
+          <a:lstStyle/>
+          <a:p>
+            <a:pPr algn="l" rtl="0"/>
+            <a:r>
+              <a:rPr lang="en-US" dirty="0"/>
+              <a:t>High-Level Architecture </a:t>
+            </a:r>
+            <a:endParaRPr lang="he-IL" dirty="0"/>
+          </a:p>
+        </p:txBody>
+      </p:sp>
+      <p:sp>
+        <p:nvSpPr>
+          <p:cNvPr id="3" name="מציין מיקום תוכן 2">
+            <a:extLst>
+              <a:ext uri="{FF2B5EF4-FFF2-40B4-BE49-F238E27FC236}">
+                <a16:creationId xmlns:a16="http://schemas.microsoft.com/office/drawing/2014/main" id="{FFD332E7-9020-12AF-2DF1-FA22088C4A81}"/>
+              </a:ext>
+            </a:extLst>
+          </p:cNvPr>
+          <p:cNvSpPr>
+            <a:spLocks noGrp="1"/>
+          </p:cNvSpPr>
+          <p:nvPr>
+            <p:ph idx="1"/>
+          </p:nvPr>
+        </p:nvSpPr>
+        <p:spPr/>
+        <p:txBody>
+          <a:bodyPr/>
+          <a:lstStyle/>
+          <a:p>
+            <a:pPr algn="l" rtl="0"/>
+            <a:r>
+              <a:rPr lang="en-US" dirty="0"/>
+              <a:t>Frontend (React) - User interface and interaction</a:t>
+            </a:r>
+          </a:p>
+          <a:p>
+            <a:pPr algn="l" rtl="0"/>
+            <a:r>
+              <a:rPr lang="en-US" dirty="0"/>
+              <a:t>Backend (Nose.js) – Educational logic and business rules</a:t>
+            </a:r>
+          </a:p>
+          <a:p>
+            <a:pPr algn="l" rtl="0"/>
+            <a:r>
+              <a:rPr lang="en-US" dirty="0"/>
+              <a:t>Database (MongoDB) - Historical data storage and aggregated summaries</a:t>
+            </a:r>
+            <a:endParaRPr lang="he-IL" dirty="0"/>
+          </a:p>
+        </p:txBody>
+      </p:sp>
+    </p:spTree>
+    <p:extLst>
+      <p:ext uri="{BB962C8B-B14F-4D97-AF65-F5344CB8AC3E}">
+        <p14:creationId xmlns:p14="http://schemas.microsoft.com/office/powerpoint/2010/main" val="739194112"/>
+      </p:ext>
+    </p:extLst>
+  </p:cSld>
+  <p:clrMapOvr>
+    <a:masterClrMapping/>
+  </p:clrMapOvr>
+</p:sld>
+</file>
+
+<file path=ppt/slides/slide5.xml><?xml version="1.0" encoding="utf-8"?>
+<p:sld xmlns:a="http://schemas.openxmlformats.org/drawingml/2006/main" xmlns:r="http://schemas.openxmlformats.org/officeDocument/2006/relationships" xmlns:p="http://schemas.openxmlformats.org/presentationml/2006/main">
+  <p:cSld>
+    <p:spTree>
+      <p:nvGrpSpPr>
+        <p:cNvPr id="1" name=""/>
+        <p:cNvGrpSpPr/>
+        <p:nvPr/>
+      </p:nvGrpSpPr>
+      <p:grpSpPr>
+        <a:xfrm>
+          <a:off x="0" y="0"/>
+          <a:ext cx="0" cy="0"/>
+          <a:chOff x="0" y="0"/>
+          <a:chExt cx="0" cy="0"/>
+        </a:xfrm>
+      </p:grpSpPr>
+      <p:sp>
+        <p:nvSpPr>
+          <p:cNvPr id="2" name="כותרת 1">
+            <a:extLst>
+              <a:ext uri="{FF2B5EF4-FFF2-40B4-BE49-F238E27FC236}">
+                <a16:creationId xmlns:a16="http://schemas.microsoft.com/office/drawing/2014/main" id="{3F64FAE5-23DF-EF46-A2A3-0BC555FEF488}"/>
+              </a:ext>
+            </a:extLst>
+          </p:cNvPr>
+          <p:cNvSpPr>
+            <a:spLocks noGrp="1"/>
+          </p:cNvSpPr>
+          <p:nvPr>
+            <p:ph type="title"/>
+          </p:nvPr>
+        </p:nvSpPr>
+        <p:spPr/>
+        <p:txBody>
+          <a:bodyPr/>
+          <a:lstStyle/>
+          <a:p>
+            <a:pPr algn="l" rtl="0"/>
+            <a:r>
+              <a:rPr lang="en-US" dirty="0"/>
+              <a:t>Frontend Architecture</a:t>
+            </a:r>
+            <a:endParaRPr lang="he-IL" dirty="0"/>
+          </a:p>
+        </p:txBody>
+      </p:sp>
+      <p:sp>
+        <p:nvSpPr>
+          <p:cNvPr id="3" name="מציין מיקום תוכן 2">
+            <a:extLst>
+              <a:ext uri="{FF2B5EF4-FFF2-40B4-BE49-F238E27FC236}">
+                <a16:creationId xmlns:a16="http://schemas.microsoft.com/office/drawing/2014/main" id="{FC72D51A-C0DD-69D9-CC95-5D390365C042}"/>
+              </a:ext>
+            </a:extLst>
+          </p:cNvPr>
+          <p:cNvSpPr>
+            <a:spLocks noGrp="1"/>
+          </p:cNvSpPr>
+          <p:nvPr>
+            <p:ph idx="1"/>
+          </p:nvPr>
+        </p:nvSpPr>
+        <p:spPr/>
+        <p:txBody>
+          <a:bodyPr/>
+          <a:lstStyle/>
+          <a:p>
+            <a:pPr algn="l" rtl="0"/>
+            <a:r>
+              <a:rPr lang="en-US" dirty="0"/>
+              <a:t>React + TypeScript + Vite</a:t>
+            </a:r>
+          </a:p>
+          <a:p>
+            <a:pPr algn="l" rtl="0"/>
+            <a:r>
+              <a:rPr lang="en-US" dirty="0"/>
+              <a:t>Component-based UI</a:t>
+            </a:r>
+          </a:p>
+          <a:p>
+            <a:pPr algn="l" rtl="0"/>
+            <a:r>
+              <a:rPr lang="en-US" dirty="0"/>
+              <a:t>Role-based screens</a:t>
+            </a:r>
+          </a:p>
+          <a:p>
+            <a:pPr algn="l" rtl="0"/>
+            <a:r>
+              <a:rPr lang="en-US" dirty="0"/>
+              <a:t>No business logic on client</a:t>
+            </a:r>
+            <a:endParaRPr lang="he-IL" dirty="0"/>
+          </a:p>
+        </p:txBody>
+      </p:sp>
+    </p:spTree>
+    <p:extLst>
+      <p:ext uri="{BB962C8B-B14F-4D97-AF65-F5344CB8AC3E}">
+        <p14:creationId xmlns:p14="http://schemas.microsoft.com/office/powerpoint/2010/main" val="4292712929"/>
+      </p:ext>
+    </p:extLst>
+  </p:cSld>
+  <p:clrMapOvr>
+    <a:masterClrMapping/>
+  </p:clrMapOvr>
+</p:sld>
+</file>
+
+<file path=ppt/slides/slide6.xml><?xml version="1.0" encoding="utf-8"?>
+<p:sld xmlns:a="http://schemas.openxmlformats.org/drawingml/2006/main" xmlns:r="http://schemas.openxmlformats.org/officeDocument/2006/relationships" xmlns:p="http://schemas.openxmlformats.org/presentationml/2006/main">
+  <p:cSld>
+    <p:spTree>
+      <p:nvGrpSpPr>
+        <p:cNvPr id="1" name=""/>
+        <p:cNvGrpSpPr/>
+        <p:nvPr/>
+      </p:nvGrpSpPr>
+      <p:grpSpPr>
+        <a:xfrm>
+          <a:off x="0" y="0"/>
+          <a:ext cx="0" cy="0"/>
+          <a:chOff x="0" y="0"/>
+          <a:chExt cx="0" cy="0"/>
+        </a:xfrm>
+      </p:grpSpPr>
+      <p:sp>
+        <p:nvSpPr>
+          <p:cNvPr id="2" name="כותרת 1">
+            <a:extLst>
+              <a:ext uri="{FF2B5EF4-FFF2-40B4-BE49-F238E27FC236}">
+                <a16:creationId xmlns:a16="http://schemas.microsoft.com/office/drawing/2014/main" id="{41AA14BC-8973-EF54-64CF-1E3FF4533DD9}"/>
+              </a:ext>
+            </a:extLst>
+          </p:cNvPr>
+          <p:cNvSpPr>
+            <a:spLocks noGrp="1"/>
+          </p:cNvSpPr>
+          <p:nvPr>
+            <p:ph type="title"/>
+          </p:nvPr>
+        </p:nvSpPr>
+        <p:spPr/>
+        <p:txBody>
+          <a:bodyPr/>
+          <a:lstStyle/>
+          <a:p>
+            <a:pPr algn="l" rtl="0"/>
+            <a:r>
+              <a:rPr lang="en-US" dirty="0"/>
+              <a:t>Backend Architecture</a:t>
+            </a:r>
+            <a:endParaRPr lang="he-IL" dirty="0"/>
+          </a:p>
+        </p:txBody>
+      </p:sp>
+      <p:sp>
+        <p:nvSpPr>
+          <p:cNvPr id="3" name="מציין מיקום תוכן 2">
+            <a:extLst>
+              <a:ext uri="{FF2B5EF4-FFF2-40B4-BE49-F238E27FC236}">
+                <a16:creationId xmlns:a16="http://schemas.microsoft.com/office/drawing/2014/main" id="{989ADBE1-1FDD-2C8D-2C4F-DF40C49DADF2}"/>
+              </a:ext>
+            </a:extLst>
+          </p:cNvPr>
+          <p:cNvSpPr>
+            <a:spLocks noGrp="1"/>
+          </p:cNvSpPr>
+          <p:nvPr>
+            <p:ph idx="1"/>
+          </p:nvPr>
+        </p:nvSpPr>
+        <p:spPr/>
+        <p:txBody>
+          <a:bodyPr/>
+          <a:lstStyle/>
+          <a:p>
+            <a:pPr algn="l" rtl="0"/>
+            <a:r>
+              <a:rPr lang="en-US" dirty="0"/>
+              <a:t>Node.js + TypeScript</a:t>
+            </a:r>
+          </a:p>
+          <a:p>
+            <a:pPr algn="l" rtl="0"/>
+            <a:r>
+              <a:rPr lang="en-US" dirty="0"/>
+              <a:t>REST API</a:t>
+            </a:r>
+          </a:p>
+          <a:p>
+            <a:pPr algn="l" rtl="0"/>
+            <a:r>
+              <a:rPr lang="en-US" dirty="0"/>
+              <a:t>Layered architecture:</a:t>
+            </a:r>
+          </a:p>
+          <a:p>
+            <a:pPr lvl="1" algn="l" rtl="0"/>
+            <a:r>
+              <a:rPr lang="en-US" dirty="0"/>
+              <a:t>Controllers</a:t>
+            </a:r>
+          </a:p>
+          <a:p>
+            <a:pPr lvl="1" algn="l" rtl="0"/>
+            <a:r>
+              <a:rPr lang="en-US" dirty="0" err="1"/>
+              <a:t>middlewares</a:t>
+            </a:r>
+            <a:endParaRPr lang="en-US" dirty="0"/>
+          </a:p>
+          <a:p>
+            <a:pPr lvl="1" algn="l" rtl="0"/>
+            <a:r>
+              <a:rPr lang="en-US" dirty="0"/>
+              <a:t>Services</a:t>
+            </a:r>
+          </a:p>
+          <a:p>
+            <a:pPr lvl="1" algn="l" rtl="0"/>
+            <a:r>
+              <a:rPr lang="en-US" dirty="0"/>
+              <a:t>Repositories</a:t>
+            </a:r>
+          </a:p>
+          <a:p>
+            <a:pPr lvl="1" algn="l" rtl="0"/>
+            <a:r>
+              <a:rPr lang="en-US" dirty="0"/>
+              <a:t>models</a:t>
+            </a:r>
+          </a:p>
+          <a:p>
+            <a:pPr lvl="1" algn="l" rtl="0"/>
+            <a:endParaRPr lang="he-IL" dirty="0"/>
+          </a:p>
+        </p:txBody>
+      </p:sp>
+    </p:spTree>
+    <p:extLst>
+      <p:ext uri="{BB962C8B-B14F-4D97-AF65-F5344CB8AC3E}">
+        <p14:creationId xmlns:p14="http://schemas.microsoft.com/office/powerpoint/2010/main" val="122524185"/>
+      </p:ext>
+    </p:extLst>
+  </p:cSld>
+  <p:clrMapOvr>
+    <a:masterClrMapping/>
+  </p:clrMapOvr>
+</p:sld>
+</file>
+
+<file path=ppt/slides/slide7.xml><?xml version="1.0" encoding="utf-8"?>
+<p:sld xmlns:a="http://schemas.openxmlformats.org/drawingml/2006/main" xmlns:r="http://schemas.openxmlformats.org/officeDocument/2006/relationships" xmlns:p="http://schemas.openxmlformats.org/presentationml/2006/main">
+  <p:cSld>
+    <p:spTree>
+      <p:nvGrpSpPr>
+        <p:cNvPr id="1" name=""/>
+        <p:cNvGrpSpPr/>
+        <p:nvPr/>
+      </p:nvGrpSpPr>
+      <p:grpSpPr>
+        <a:xfrm>
+          <a:off x="0" y="0"/>
+          <a:ext cx="0" cy="0"/>
+          <a:chOff x="0" y="0"/>
+          <a:chExt cx="0" cy="0"/>
+        </a:xfrm>
+      </p:grpSpPr>
+      <p:sp>
+        <p:nvSpPr>
+          <p:cNvPr id="2" name="כותרת 1">
+            <a:extLst>
+              <a:ext uri="{FF2B5EF4-FFF2-40B4-BE49-F238E27FC236}">
+                <a16:creationId xmlns:a16="http://schemas.microsoft.com/office/drawing/2014/main" id="{4EA576F0-7974-58CC-514B-260FD2325759}"/>
+              </a:ext>
+            </a:extLst>
+          </p:cNvPr>
+          <p:cNvSpPr>
+            <a:spLocks noGrp="1"/>
+          </p:cNvSpPr>
+          <p:nvPr>
+            <p:ph type="title"/>
+          </p:nvPr>
+        </p:nvSpPr>
+        <p:spPr/>
+        <p:txBody>
+          <a:bodyPr/>
+          <a:lstStyle/>
+          <a:p>
+            <a:pPr algn="l" rtl="0"/>
+            <a:r>
+              <a:rPr lang="en-US" dirty="0"/>
+              <a:t>Data Architecture</a:t>
+            </a:r>
+            <a:endParaRPr lang="he-IL" dirty="0"/>
+          </a:p>
+        </p:txBody>
+      </p:sp>
+      <p:sp>
+        <p:nvSpPr>
+          <p:cNvPr id="3" name="מציין מיקום תוכן 2">
+            <a:extLst>
+              <a:ext uri="{FF2B5EF4-FFF2-40B4-BE49-F238E27FC236}">
+                <a16:creationId xmlns:a16="http://schemas.microsoft.com/office/drawing/2014/main" id="{43863C2E-9D91-DA38-4058-BA3B692AF872}"/>
+              </a:ext>
+            </a:extLst>
+          </p:cNvPr>
+          <p:cNvSpPr>
+            <a:spLocks noGrp="1"/>
+          </p:cNvSpPr>
+          <p:nvPr>
+            <p:ph idx="1"/>
+          </p:nvPr>
+        </p:nvSpPr>
+        <p:spPr/>
+        <p:txBody>
+          <a:bodyPr>
+            <a:normAutofit lnSpcReduction="10000"/>
+          </a:bodyPr>
+          <a:lstStyle/>
+          <a:p>
+            <a:pPr algn="l" rtl="0"/>
+            <a:r>
+              <a:rPr lang="en-US" dirty="0"/>
+              <a:t>Database: MongoDB</a:t>
+            </a:r>
+          </a:p>
+          <a:p>
+            <a:pPr algn="l" rtl="0"/>
+            <a:r>
+              <a:rPr lang="en-US" dirty="0"/>
+              <a:t>Data Organization:</a:t>
+            </a:r>
+          </a:p>
+          <a:p>
+            <a:pPr lvl="1" algn="l" rtl="0"/>
+            <a:r>
+              <a:rPr lang="en-US" dirty="0"/>
+              <a:t>Collections organized by functional domains</a:t>
+            </a:r>
+          </a:p>
+          <a:p>
+            <a:pPr algn="l" rtl="0"/>
+            <a:r>
+              <a:rPr lang="en-US" dirty="0"/>
+              <a:t>Data Strategy:</a:t>
+            </a:r>
+          </a:p>
+          <a:p>
+            <a:pPr lvl="1" algn="l" rtl="0"/>
+            <a:r>
+              <a:rPr lang="en-US" dirty="0"/>
+              <a:t>Separation between raw operational data and aggregated analytical data</a:t>
+            </a:r>
+          </a:p>
+          <a:p>
+            <a:pPr lvl="1" algn="l" rtl="0"/>
+            <a:r>
+              <a:rPr lang="en-US" dirty="0"/>
+              <a:t>Raw data stores daily inputs (e.g. lesson scores, behavioral entries)</a:t>
+            </a:r>
+          </a:p>
+          <a:p>
+            <a:pPr lvl="1" algn="l" rtl="0"/>
+            <a:r>
+              <a:rPr lang="en-US" dirty="0"/>
+              <a:t>Aggregated data stores pre-calculated summaries (e.g. weekly results, excellence status)</a:t>
+            </a:r>
+          </a:p>
+          <a:p>
+            <a:pPr algn="l" rtl="0"/>
+            <a:r>
+              <a:rPr lang="en-US" dirty="0"/>
+              <a:t>Design Principle:</a:t>
+            </a:r>
+          </a:p>
+          <a:p>
+            <a:pPr lvl="1" algn="l" rtl="0"/>
+            <a:r>
+              <a:rPr lang="en-US" dirty="0"/>
+              <a:t>Heavy computations are calculated once and stored as summaries</a:t>
+            </a:r>
+          </a:p>
+          <a:p>
+            <a:pPr lvl="1" algn="l" rtl="0"/>
+            <a:r>
+              <a:rPr lang="en-US" dirty="0"/>
+              <a:t>Data is retrieved efficiently without recalculating on every request</a:t>
+            </a:r>
+          </a:p>
+          <a:p>
+            <a:pPr lvl="1" algn="l" rtl="0"/>
+            <a:endParaRPr lang="en-US" dirty="0"/>
+          </a:p>
+          <a:p>
+            <a:pPr algn="l" rtl="0"/>
+            <a:endParaRPr lang="he-IL" dirty="0"/>
+          </a:p>
+        </p:txBody>
+      </p:sp>
+    </p:spTree>
+    <p:extLst>
+      <p:ext uri="{BB962C8B-B14F-4D97-AF65-F5344CB8AC3E}">
+        <p14:creationId xmlns:p14="http://schemas.microsoft.com/office/powerpoint/2010/main" val="3603765049"/>
+      </p:ext>
+    </p:extLst>
+  </p:cSld>
+  <p:clrMapOvr>
+    <a:masterClrMapping/>
+  </p:clrMapOvr>
+</p:sld>
+</file>
+
+<file path=ppt/slides/slide8.xml><?xml version="1.0" encoding="utf-8"?>
+<p:sld xmlns:a="http://schemas.openxmlformats.org/drawingml/2006/main" xmlns:r="http://schemas.openxmlformats.org/officeDocument/2006/relationships" xmlns:p="http://schemas.openxmlformats.org/presentationml/2006/main">
+  <p:cSld>
+    <p:spTree>
+      <p:nvGrpSpPr>
+        <p:cNvPr id="1" name=""/>
+        <p:cNvGrpSpPr/>
+        <p:nvPr/>
+      </p:nvGrpSpPr>
+      <p:grpSpPr>
+        <a:xfrm>
+          <a:off x="0" y="0"/>
+          <a:ext cx="0" cy="0"/>
+          <a:chOff x="0" y="0"/>
+          <a:chExt cx="0" cy="0"/>
+        </a:xfrm>
+      </p:grpSpPr>
+      <p:sp>
+        <p:nvSpPr>
+          <p:cNvPr id="2" name="כותרת 1">
+            <a:extLst>
+              <a:ext uri="{FF2B5EF4-FFF2-40B4-BE49-F238E27FC236}">
+                <a16:creationId xmlns:a16="http://schemas.microsoft.com/office/drawing/2014/main" id="{A4B5F8E3-C38B-FE44-B37A-1149C0945A29}"/>
+              </a:ext>
+            </a:extLst>
+          </p:cNvPr>
+          <p:cNvSpPr>
+            <a:spLocks noGrp="1"/>
+          </p:cNvSpPr>
+          <p:nvPr>
+            <p:ph type="title"/>
+          </p:nvPr>
+        </p:nvSpPr>
+        <p:spPr/>
+        <p:txBody>
+          <a:bodyPr/>
+          <a:lstStyle/>
+          <a:p>
+            <a:pPr algn="l" rtl="0"/>
+            <a:r>
+              <a:rPr lang="en-US" dirty="0"/>
+              <a:t>Core Domains</a:t>
+            </a:r>
+            <a:endParaRPr lang="he-IL" dirty="0"/>
+          </a:p>
+        </p:txBody>
+      </p:sp>
+      <p:sp>
+        <p:nvSpPr>
+          <p:cNvPr id="3" name="מציין מיקום תוכן 2">
+            <a:extLst>
+              <a:ext uri="{FF2B5EF4-FFF2-40B4-BE49-F238E27FC236}">
+                <a16:creationId xmlns:a16="http://schemas.microsoft.com/office/drawing/2014/main" id="{C946C452-A274-1A2D-5C71-E3093DF6F42A}"/>
+              </a:ext>
+            </a:extLst>
+          </p:cNvPr>
+          <p:cNvSpPr>
+            <a:spLocks noGrp="1"/>
+          </p:cNvSpPr>
+          <p:nvPr>
+            <p:ph idx="1"/>
+          </p:nvPr>
+        </p:nvSpPr>
+        <p:spPr/>
+        <p:txBody>
+          <a:bodyPr/>
+          <a:lstStyle/>
+          <a:p>
+            <a:pPr algn="l" rtl="0"/>
+            <a:r>
+              <a:rPr lang="en-US" dirty="0"/>
+              <a:t>Users &amp; Roles</a:t>
+            </a:r>
+          </a:p>
+          <a:p>
+            <a:pPr algn="l" rtl="0"/>
+            <a:r>
+              <a:rPr lang="en-US" dirty="0"/>
+              <a:t>Classes &amp; Lessons</a:t>
+            </a:r>
+          </a:p>
+          <a:p>
+            <a:pPr algn="l" rtl="0"/>
+            <a:r>
+              <a:rPr lang="en-US" dirty="0"/>
+              <a:t>Scoring &amp; Excellence</a:t>
+            </a:r>
+          </a:p>
+          <a:p>
+            <a:pPr algn="l" rtl="0"/>
+            <a:r>
+              <a:rPr lang="en-US" dirty="0"/>
+              <a:t>Messaging &amp; Behavioral Reports</a:t>
+            </a:r>
+          </a:p>
+          <a:p>
+            <a:pPr algn="l" rtl="0"/>
+            <a:r>
+              <a:rPr lang="en-US" dirty="0"/>
+              <a:t>Digital Kiosk</a:t>
+            </a:r>
+            <a:endParaRPr lang="he-IL" dirty="0"/>
+          </a:p>
+        </p:txBody>
+      </p:sp>
+    </p:spTree>
+    <p:extLst>
+      <p:ext uri="{BB962C8B-B14F-4D97-AF65-F5344CB8AC3E}">
+        <p14:creationId xmlns:p14="http://schemas.microsoft.com/office/powerpoint/2010/main" val="2102167074"/>
+      </p:ext>
+    </p:extLst>
+  </p:cSld>
+  <p:clrMapOvr>
+    <a:masterClrMapping/>
+  </p:clrMapOvr>
+</p:sld>
+</file>
+
+<file path=ppt/slides/slide9.xml><?xml version="1.0" encoding="utf-8"?>
+<p:sld xmlns:a="http://schemas.openxmlformats.org/drawingml/2006/main" xmlns:r="http://schemas.openxmlformats.org/officeDocument/2006/relationships" xmlns:p="http://schemas.openxmlformats.org/presentationml/2006/main">
+  <p:cSld>
+    <p:spTree>
+      <p:nvGrpSpPr>
+        <p:cNvPr id="1" name=""/>
+        <p:cNvGrpSpPr/>
+        <p:nvPr/>
+      </p:nvGrpSpPr>
+      <p:grpSpPr>
+        <a:xfrm>
+          <a:off x="0" y="0"/>
+          <a:ext cx="0" cy="0"/>
+          <a:chOff x="0" y="0"/>
+          <a:chExt cx="0" cy="0"/>
+        </a:xfrm>
+      </p:grpSpPr>
+      <p:sp>
+        <p:nvSpPr>
+          <p:cNvPr id="2" name="כותרת 1">
+            <a:extLst>
+              <a:ext uri="{FF2B5EF4-FFF2-40B4-BE49-F238E27FC236}">
+                <a16:creationId xmlns:a16="http://schemas.microsoft.com/office/drawing/2014/main" id="{EC2B20AB-388D-EA10-074B-94E831176D22}"/>
+              </a:ext>
+            </a:extLst>
+          </p:cNvPr>
+          <p:cNvSpPr>
+            <a:spLocks noGrp="1"/>
+          </p:cNvSpPr>
+          <p:nvPr>
+            <p:ph type="title"/>
+          </p:nvPr>
+        </p:nvSpPr>
+        <p:spPr/>
+        <p:txBody>
+          <a:bodyPr/>
+          <a:lstStyle/>
+          <a:p>
+            <a:pPr algn="l" rtl="0"/>
+            <a:r>
+              <a:rPr lang="en-US" dirty="0"/>
+              <a:t>Security &amp; Permissions</a:t>
+            </a:r>
+            <a:endParaRPr lang="he-IL" dirty="0"/>
+          </a:p>
+        </p:txBody>
+      </p:sp>
+      <p:sp>
+        <p:nvSpPr>
+          <p:cNvPr id="3" name="מציין מיקום תוכן 2">
+            <a:extLst>
+              <a:ext uri="{FF2B5EF4-FFF2-40B4-BE49-F238E27FC236}">
+                <a16:creationId xmlns:a16="http://schemas.microsoft.com/office/drawing/2014/main" id="{469C527B-BF67-E09F-010A-F517E3B0AFB7}"/>
+              </a:ext>
+            </a:extLst>
+          </p:cNvPr>
+          <p:cNvSpPr>
+            <a:spLocks noGrp="1"/>
+          </p:cNvSpPr>
+          <p:nvPr>
+            <p:ph idx="1"/>
+          </p:nvPr>
+        </p:nvSpPr>
+        <p:spPr/>
+        <p:txBody>
+          <a:bodyPr/>
+          <a:lstStyle/>
+          <a:p>
+            <a:pPr algn="l" rtl="0"/>
+            <a:r>
+              <a:rPr lang="en-US" dirty="0"/>
+              <a:t>Authentication (login)</a:t>
+            </a:r>
+          </a:p>
+          <a:p>
+            <a:pPr algn="l" rtl="0"/>
+            <a:r>
+              <a:rPr lang="en-US" dirty="0"/>
+              <a:t>Authorization (roles)</a:t>
+            </a:r>
+          </a:p>
+          <a:p>
+            <a:pPr algn="l" rtl="0"/>
+            <a:r>
+              <a:rPr lang="en-US" dirty="0"/>
+              <a:t>Data isolation per role</a:t>
+            </a:r>
+          </a:p>
+          <a:p>
+            <a:pPr algn="l" rtl="0"/>
+            <a:r>
+              <a:rPr lang="en-US" dirty="0"/>
+              <a:t>Server-side validation</a:t>
+            </a:r>
+            <a:endParaRPr lang="he-IL" dirty="0"/>
+          </a:p>
+        </p:txBody>
+      </p:sp>
+    </p:spTree>
+    <p:extLst>
+      <p:ext uri="{BB962C8B-B14F-4D97-AF65-F5344CB8AC3E}">
+        <p14:creationId xmlns:p14="http://schemas.microsoft.com/office/powerpoint/2010/main" val="3953597968"/>
+      </p:ext>
+    </p:extLst>
+  </p:cSld>
+  <p:clrMapOvr>
+    <a:masterClrMapping/>
+  </p:clrMapOvr>
+</p:sld>
+</file>
+
 <file path=ppt/theme/theme1.xml><?xml version="1.0" encoding="utf-8"?>
 <a:theme xmlns:a="http://schemas.openxmlformats.org/drawingml/2006/main" name="ערכת נושא Office">
   <a:themeElements>
